--- a/ppt/IoTAI28-LiteRT-Torch.pptx
+++ b/ppt/IoTAI28-LiteRT-Torch.pptx
@@ -4484,9 +4484,10 @@
           <a:lstStyle/>
           <a:p>
             <a:r>
-              <a:rPr lang="fr-FR" dirty="0"/>
-              <a:t>TP 28</a:t>
-            </a:r>
+              <a:rPr lang="fr-FR"/>
+              <a:t>TP 29</a:t>
+            </a:r>
+            <a:endParaRPr lang="fr-FR" dirty="0"/>
           </a:p>
         </p:txBody>
       </p:sp>

--- a/ppt/IoTAI28-LiteRT-Torch.pptx
+++ b/ppt/IoTAI28-LiteRT-Torch.pptx
@@ -5,19 +5,20 @@
     <p:sldMasterId id="2147483653" r:id="rId1"/>
   </p:sldMasterIdLst>
   <p:notesMasterIdLst>
-    <p:notesMasterId r:id="rId9"/>
+    <p:notesMasterId r:id="rId10"/>
   </p:notesMasterIdLst>
   <p:handoutMasterIdLst>
-    <p:handoutMasterId r:id="rId10"/>
+    <p:handoutMasterId r:id="rId11"/>
   </p:handoutMasterIdLst>
   <p:sldIdLst>
     <p:sldId id="264" r:id="rId2"/>
-    <p:sldId id="266" r:id="rId3"/>
-    <p:sldId id="269" r:id="rId4"/>
-    <p:sldId id="267" r:id="rId5"/>
-    <p:sldId id="268" r:id="rId6"/>
-    <p:sldId id="270" r:id="rId7"/>
-    <p:sldId id="271" r:id="rId8"/>
+    <p:sldId id="272" r:id="rId3"/>
+    <p:sldId id="266" r:id="rId4"/>
+    <p:sldId id="269" r:id="rId5"/>
+    <p:sldId id="267" r:id="rId6"/>
+    <p:sldId id="268" r:id="rId7"/>
+    <p:sldId id="270" r:id="rId8"/>
+    <p:sldId id="271" r:id="rId9"/>
   </p:sldIdLst>
   <p:sldSz cx="9144000" cy="6858000" type="screen4x3"/>
   <p:notesSz cx="6648450" cy="9782175"/>
@@ -3777,6 +3778,150 @@
           <p:cNvPr id="2" name="Titre 1">
             <a:extLst>
               <a:ext uri="{FF2B5EF4-FFF2-40B4-BE49-F238E27FC236}">
+                <a16:creationId xmlns:a16="http://schemas.microsoft.com/office/drawing/2014/main" id="{B8B7A6BC-4D53-4B13-A7C7-09A1D2887BC8}"/>
+              </a:ext>
+            </a:extLst>
+          </p:cNvPr>
+          <p:cNvSpPr>
+            <a:spLocks noGrp="1"/>
+          </p:cNvSpPr>
+          <p:nvPr>
+            <p:ph type="title"/>
+          </p:nvPr>
+        </p:nvSpPr>
+        <p:spPr/>
+        <p:txBody>
+          <a:bodyPr/>
+          <a:lstStyle/>
+          <a:p>
+            <a:r>
+              <a:rPr lang="fr-FR" dirty="0"/>
+              <a:t>2 approches pour l’embarqué</a:t>
+            </a:r>
+          </a:p>
+        </p:txBody>
+      </p:sp>
+      <p:sp>
+        <p:nvSpPr>
+          <p:cNvPr id="3" name="Espace réservé du contenu 2">
+            <a:extLst>
+              <a:ext uri="{FF2B5EF4-FFF2-40B4-BE49-F238E27FC236}">
+                <a16:creationId xmlns:a16="http://schemas.microsoft.com/office/drawing/2014/main" id="{6A076BB7-B79E-4C5E-A8A9-4592D2643C34}"/>
+              </a:ext>
+            </a:extLst>
+          </p:cNvPr>
+          <p:cNvSpPr>
+            <a:spLocks noGrp="1"/>
+          </p:cNvSpPr>
+          <p:nvPr>
+            <p:ph idx="1"/>
+          </p:nvPr>
+        </p:nvSpPr>
+        <p:spPr/>
+        <p:txBody>
+          <a:bodyPr/>
+          <a:lstStyle/>
+          <a:p>
+            <a:r>
+              <a:rPr lang="fr-FR" dirty="0"/>
+              <a:t>ONNX</a:t>
+            </a:r>
+          </a:p>
+          <a:p>
+            <a:pPr lvl="1"/>
+            <a:r>
+              <a:rPr lang="fr-FR" dirty="0"/>
+              <a:t>Ancien</a:t>
+            </a:r>
+          </a:p>
+          <a:p>
+            <a:pPr lvl="1"/>
+            <a:r>
+              <a:rPr lang="fr-FR" dirty="0"/>
+              <a:t>Respect des normes</a:t>
+            </a:r>
+          </a:p>
+          <a:p>
+            <a:pPr lvl="1"/>
+            <a:r>
+              <a:rPr lang="fr-FR" dirty="0"/>
+              <a:t>Fiabilité ?</a:t>
+            </a:r>
+          </a:p>
+          <a:p>
+            <a:r>
+              <a:rPr lang="fr-FR" dirty="0" err="1"/>
+              <a:t>LiteRT-Torch</a:t>
+            </a:r>
+            <a:endParaRPr lang="fr-FR" dirty="0"/>
+          </a:p>
+          <a:p>
+            <a:pPr lvl="1"/>
+            <a:r>
+              <a:rPr lang="fr-FR" dirty="0"/>
+              <a:t>Nouveau</a:t>
+            </a:r>
+          </a:p>
+          <a:p>
+            <a:pPr lvl="1"/>
+            <a:r>
+              <a:rPr lang="fr-FR" dirty="0"/>
+              <a:t>Peu mature</a:t>
+            </a:r>
+          </a:p>
+          <a:p>
+            <a:pPr lvl="1"/>
+            <a:r>
+              <a:rPr lang="fr-FR" dirty="0"/>
+              <a:t>Linux </a:t>
+            </a:r>
+            <a:r>
+              <a:rPr lang="fr-FR" dirty="0" err="1"/>
+              <a:t>only</a:t>
+            </a:r>
+            <a:endParaRPr lang="fr-FR"/>
+          </a:p>
+          <a:p>
+            <a:pPr lvl="1"/>
+            <a:endParaRPr lang="fr-FR" dirty="0"/>
+          </a:p>
+        </p:txBody>
+      </p:sp>
+    </p:spTree>
+    <p:extLst>
+      <p:ext uri="{BB962C8B-B14F-4D97-AF65-F5344CB8AC3E}">
+        <p14:creationId xmlns:p14="http://schemas.microsoft.com/office/powerpoint/2010/main" val="366530385"/>
+      </p:ext>
+    </p:extLst>
+  </p:cSld>
+  <p:clrMapOvr>
+    <a:masterClrMapping/>
+  </p:clrMapOvr>
+</p:sld>
+</file>
+
+<file path=ppt/slides/slide3.xml><?xml version="1.0" encoding="utf-8"?>
+<p:sld xmlns:a="http://schemas.openxmlformats.org/drawingml/2006/main" xmlns:r="http://schemas.openxmlformats.org/officeDocument/2006/relationships" xmlns:p="http://schemas.openxmlformats.org/presentationml/2006/main">
+  <p:cSld>
+    <p:spTree>
+      <p:nvGrpSpPr>
+        <p:cNvPr id="1" name=""/>
+        <p:cNvGrpSpPr/>
+        <p:nvPr/>
+      </p:nvGrpSpPr>
+      <p:grpSpPr>
+        <a:xfrm>
+          <a:off x="0" y="0"/>
+          <a:ext cx="0" cy="0"/>
+          <a:chOff x="0" y="0"/>
+          <a:chExt cx="0" cy="0"/>
+        </a:xfrm>
+      </p:grpSpPr>
+      <p:sp>
+        <p:nvSpPr>
+          <p:cNvPr id="2" name="Titre 1">
+            <a:extLst>
+              <a:ext uri="{FF2B5EF4-FFF2-40B4-BE49-F238E27FC236}">
                 <a16:creationId xmlns:a16="http://schemas.microsoft.com/office/drawing/2014/main" id="{56E6E868-106D-3E09-2A65-9A56328AA1A0}"/>
               </a:ext>
             </a:extLst>
@@ -3885,7 +4030,7 @@
 </p:sld>
 </file>
 
-<file path=ppt/slides/slide3.xml><?xml version="1.0" encoding="utf-8"?>
+<file path=ppt/slides/slide4.xml><?xml version="1.0" encoding="utf-8"?>
 <p:sld xmlns:a="http://schemas.openxmlformats.org/drawingml/2006/main" xmlns:r="http://schemas.openxmlformats.org/officeDocument/2006/relationships" xmlns:p="http://schemas.openxmlformats.org/presentationml/2006/main">
   <p:cSld>
     <p:spTree>
@@ -3953,15 +4098,7 @@
           <a:p>
             <a:r>
               <a:rPr lang="fr-FR" dirty="0"/>
-              <a:t>PT n'a pas d'outil pour convertir vers des </a:t>
-            </a:r>
-            <a:r>
-              <a:rPr lang="fr-FR" dirty="0" err="1"/>
-              <a:t>microcontroleurs</a:t>
-            </a:r>
-            <a:r>
-              <a:rPr lang="fr-FR" dirty="0"/>
-              <a:t> à faible puissance et mémoire</a:t>
+              <a:t>PT n'a pas d'outil pour convertir vers des microcontrôleurs à faible puissance et mémoire</a:t>
             </a:r>
           </a:p>
           <a:p>
@@ -4016,32 +4153,15 @@
           <a:p>
             <a:r>
               <a:rPr lang="fr-FR" dirty="0"/>
-              <a:t>En revanche PT possède des </a:t>
-            </a:r>
-            <a:r>
-              <a:rPr lang="fr-FR" dirty="0" err="1"/>
-              <a:t>convertions</a:t>
-            </a:r>
+              <a:t>En revanche PT possède des outils de conversions très efficaces vers NPU, GPU et microcontrôleurs puissant</a:t>
+            </a:r>
+          </a:p>
+          <a:p>
+            <a:pPr lvl="1"/>
             <a:r>
               <a:rPr lang="fr-FR" dirty="0"/>
-              <a:t> très efficaces vers NPU, GPU et </a:t>
-            </a:r>
-            <a:r>
-              <a:rPr lang="fr-FR" dirty="0" err="1"/>
-              <a:t>microcontroleurs</a:t>
-            </a:r>
-            <a:r>
-              <a:rPr lang="fr-FR" dirty="0"/>
-              <a:t> puissant</a:t>
-            </a:r>
-          </a:p>
-          <a:p>
-            <a:pPr lvl="1"/>
-            <a:r>
-              <a:rPr lang="fr-FR"/>
               <a:t>Chapitre suivant</a:t>
             </a:r>
-            <a:endParaRPr lang="fr-FR" dirty="0"/>
           </a:p>
         </p:txBody>
       </p:sp>
@@ -4058,7 +4178,7 @@
 </p:sld>
 </file>
 
-<file path=ppt/slides/slide4.xml><?xml version="1.0" encoding="utf-8"?>
+<file path=ppt/slides/slide5.xml><?xml version="1.0" encoding="utf-8"?>
 <p:sld xmlns:a="http://schemas.openxmlformats.org/drawingml/2006/main" xmlns:r="http://schemas.openxmlformats.org/officeDocument/2006/relationships" xmlns:p="http://schemas.openxmlformats.org/presentationml/2006/main">
   <p:cSld>
     <p:spTree>
@@ -4198,7 +4318,7 @@
 </p:sld>
 </file>
 
-<file path=ppt/slides/slide5.xml><?xml version="1.0" encoding="utf-8"?>
+<file path=ppt/slides/slide6.xml><?xml version="1.0" encoding="utf-8"?>
 <p:sld xmlns:a="http://schemas.openxmlformats.org/drawingml/2006/main" xmlns:r="http://schemas.openxmlformats.org/officeDocument/2006/relationships" xmlns:p="http://schemas.openxmlformats.org/presentationml/2006/main">
   <p:cSld>
     <p:spTree>
@@ -4327,7 +4447,7 @@
 </p:sld>
 </file>
 
-<file path=ppt/slides/slide6.xml><?xml version="1.0" encoding="utf-8"?>
+<file path=ppt/slides/slide7.xml><?xml version="1.0" encoding="utf-8"?>
 <p:sld xmlns:a="http://schemas.openxmlformats.org/drawingml/2006/main" xmlns:r="http://schemas.openxmlformats.org/officeDocument/2006/relationships" xmlns:p="http://schemas.openxmlformats.org/presentationml/2006/main">
   <p:cSld>
     <p:spTree>
@@ -4445,7 +4565,7 @@
 </p:sld>
 </file>
 
-<file path=ppt/slides/slide7.xml><?xml version="1.0" encoding="utf-8"?>
+<file path=ppt/slides/slide8.xml><?xml version="1.0" encoding="utf-8"?>
 <p:sld xmlns:a="http://schemas.openxmlformats.org/drawingml/2006/main" xmlns:r="http://schemas.openxmlformats.org/officeDocument/2006/relationships" xmlns:p="http://schemas.openxmlformats.org/presentationml/2006/main">
   <p:cSld>
     <p:spTree>
